--- a/Docs_Ingeniería/presentacion.pptx
+++ b/Docs_Ingeniería/presentacion.pptx
@@ -5,49 +5,50 @@
     <p:sldMasterId id="2147483662" r:id="rId1"/>
   </p:sldMasterIdLst>
   <p:notesMasterIdLst>
-    <p:notesMasterId r:id="rId6"/>
+    <p:notesMasterId r:id="rId7"/>
   </p:notesMasterIdLst>
   <p:sldIdLst>
     <p:sldId id="256" r:id="rId2"/>
     <p:sldId id="258" r:id="rId3"/>
     <p:sldId id="257" r:id="rId4"/>
-    <p:sldId id="290" r:id="rId5"/>
+    <p:sldId id="291" r:id="rId5"/>
+    <p:sldId id="290" r:id="rId6"/>
   </p:sldIdLst>
   <p:sldSz cx="12192000" cy="6858000"/>
   <p:notesSz cx="6858000" cy="9144000"/>
   <p:embeddedFontLst>
     <p:embeddedFont>
       <p:font typeface="Archivo" panose="020B0604020202020204" charset="0"/>
-      <p:regular r:id="rId7"/>
-      <p:bold r:id="rId8"/>
-      <p:italic r:id="rId9"/>
-      <p:boldItalic r:id="rId10"/>
+      <p:regular r:id="rId8"/>
+      <p:bold r:id="rId9"/>
+      <p:italic r:id="rId10"/>
+      <p:boldItalic r:id="rId11"/>
     </p:embeddedFont>
     <p:embeddedFont>
       <p:font typeface="Archivo ExtraBold" panose="020B0604020202020204" charset="0"/>
-      <p:bold r:id="rId11"/>
-      <p:boldItalic r:id="rId12"/>
+      <p:bold r:id="rId12"/>
+      <p:boldItalic r:id="rId13"/>
     </p:embeddedFont>
     <p:embeddedFont>
       <p:font typeface="Archivo Light" panose="020B0604020202020204" charset="0"/>
-      <p:regular r:id="rId13"/>
-      <p:bold r:id="rId14"/>
-      <p:italic r:id="rId15"/>
-      <p:boldItalic r:id="rId16"/>
+      <p:regular r:id="rId14"/>
+      <p:bold r:id="rId15"/>
+      <p:italic r:id="rId16"/>
+      <p:boldItalic r:id="rId17"/>
     </p:embeddedFont>
     <p:embeddedFont>
       <p:font typeface="Inter" panose="020B0604020202020204" charset="0"/>
-      <p:regular r:id="rId17"/>
-      <p:bold r:id="rId18"/>
-      <p:italic r:id="rId19"/>
-      <p:boldItalic r:id="rId20"/>
+      <p:regular r:id="rId18"/>
+      <p:bold r:id="rId19"/>
+      <p:italic r:id="rId20"/>
+      <p:boldItalic r:id="rId21"/>
     </p:embeddedFont>
     <p:embeddedFont>
       <p:font typeface="Inter Medium" panose="020B0604020202020204" charset="0"/>
-      <p:regular r:id="rId21"/>
-      <p:bold r:id="rId22"/>
-      <p:italic r:id="rId23"/>
-      <p:boldItalic r:id="rId24"/>
+      <p:regular r:id="rId22"/>
+      <p:bold r:id="rId23"/>
+      <p:italic r:id="rId24"/>
+      <p:boldItalic r:id="rId25"/>
     </p:embeddedFont>
   </p:embeddedFontLst>
   <p:defaultTextStyle>
@@ -150,7 +151,7 @@
       <p15:sldGuideLst xmlns:p15="http://schemas.microsoft.com/office/powerpoint/2012/main"/>
     </p:ext>
     <p:ext uri="GoogleSlidesCustomDataVersion2">
-      <go:slidesCustomData xmlns="" xmlns:mc="http://schemas.openxmlformats.org/markup-compatibility/2006" xmlns:mv="urn:schemas-microsoft-com:mac:vml" xmlns:c="http://schemas.openxmlformats.org/drawingml/2006/chart" xmlns:dgm="http://schemas.openxmlformats.org/drawingml/2006/diagram" xmlns:o="urn:schemas-microsoft-com:office:office" xmlns:v="urn:schemas-microsoft-com:vml" xmlns:pvml="urn:schemas-microsoft-com:office:powerpoint" xmlns:com="http://schemas.openxmlformats.org/drawingml/2006/compatibility" xmlns:p14="http://schemas.microsoft.com/office/powerpoint/2010/main" xmlns:p15="http://schemas.microsoft.com/office/powerpoint/2012/main" xmlns:ahyp="http://schemas.microsoft.com/office/drawing/2018/hyperlinkcolor" xmlns:go="http://customooxmlschemas.google.com/" r:id="rId71" roundtripDataSignature="AMtx7mgRIfC3IOTSa1CmiUdIdvghPDL28A=="/>
+      <go:slidesCustomData xmlns:go="http://customooxmlschemas.google.com/" xmlns:ahyp="http://schemas.microsoft.com/office/drawing/2018/hyperlinkcolor" xmlns:p15="http://schemas.microsoft.com/office/powerpoint/2012/main" xmlns:p14="http://schemas.microsoft.com/office/powerpoint/2010/main" xmlns:com="http://schemas.openxmlformats.org/drawingml/2006/compatibility" xmlns:pvml="urn:schemas-microsoft-com:office:powerpoint" xmlns:v="urn:schemas-microsoft-com:vml" xmlns:o="urn:schemas-microsoft-com:office:office" xmlns:dgm="http://schemas.openxmlformats.org/drawingml/2006/diagram" xmlns:c="http://schemas.openxmlformats.org/drawingml/2006/chart" xmlns:mv="urn:schemas-microsoft-com:mac:vml" xmlns:mc="http://schemas.openxmlformats.org/markup-compatibility/2006" xmlns="" r:id="rId71" roundtripDataSignature="AMtx7mgRIfC3IOTSa1CmiUdIdvghPDL28A=="/>
     </p:ext>
   </p:extLst>
 </p:presentation>
@@ -256,6 +257,13 @@
             <a:tailEnd type="none" w="sm" len="sm"/>
           </a:ln>
         </p:spPr>
+        <p:txBody>
+          <a:bodyPr/>
+          <a:lstStyle/>
+          <a:p>
+            <a:endParaRPr lang="es-CO"/>
+          </a:p>
+        </p:txBody>
       </p:sp>
       <p:sp>
         <p:nvSpPr>
@@ -873,6 +881,13 @@
             <a:tailEnd type="none" w="sm" len="sm"/>
           </a:ln>
         </p:spPr>
+        <p:txBody>
+          <a:bodyPr/>
+          <a:lstStyle/>
+          <a:p>
+            <a:endParaRPr lang="es-CO"/>
+          </a:p>
+        </p:txBody>
       </p:sp>
     </p:spTree>
   </p:cSld>
@@ -995,6 +1010,13 @@
             <a:tailEnd type="none" w="sm" len="sm"/>
           </a:ln>
         </p:spPr>
+        <p:txBody>
+          <a:bodyPr/>
+          <a:lstStyle/>
+          <a:p>
+            <a:endParaRPr lang="es-CO"/>
+          </a:p>
+        </p:txBody>
       </p:sp>
     </p:spTree>
   </p:cSld>
@@ -1117,6 +1139,13 @@
             <a:tailEnd type="none" w="sm" len="sm"/>
           </a:ln>
         </p:spPr>
+        <p:txBody>
+          <a:bodyPr/>
+          <a:lstStyle/>
+          <a:p>
+            <a:endParaRPr lang="es-CO"/>
+          </a:p>
+        </p:txBody>
       </p:sp>
     </p:spTree>
   </p:cSld>
@@ -1131,7 +1160,13 @@
   <p:cSld>
     <p:spTree>
       <p:nvGrpSpPr>
-        <p:cNvPr id="1" name="Shape 607"/>
+        <p:cNvPr id="1" name="Shape 27">
+          <a:extLst>
+            <a:ext uri="{FF2B5EF4-FFF2-40B4-BE49-F238E27FC236}">
+              <a16:creationId xmlns:a16="http://schemas.microsoft.com/office/drawing/2014/main" id="{6EB82907-565F-B2A3-5837-5430984176FE}"/>
+            </a:ext>
+          </a:extLst>
+        </p:cNvPr>
         <p:cNvGrpSpPr/>
         <p:nvPr/>
       </p:nvGrpSpPr>
@@ -1145,7 +1180,13 @@
       </p:grpSpPr>
       <p:sp>
         <p:nvSpPr>
-          <p:cNvPr id="608" name="Google Shape;608;p35:notes"/>
+          <p:cNvPr id="28" name="Google Shape;28;p2:notes">
+            <a:extLst>
+              <a:ext uri="{FF2B5EF4-FFF2-40B4-BE49-F238E27FC236}">
+                <a16:creationId xmlns:a16="http://schemas.microsoft.com/office/drawing/2014/main" id="{2F2D7D72-540A-CC21-BB73-9E433EEB7197}"/>
+              </a:ext>
+            </a:extLst>
+          </p:cNvPr>
           <p:cNvSpPr txBox="1">
             <a:spLocks noGrp="1"/>
           </p:cNvSpPr>
@@ -1191,7 +1232,13 @@
       </p:sp>
       <p:sp>
         <p:nvSpPr>
-          <p:cNvPr id="609" name="Google Shape;609;p35:notes"/>
+          <p:cNvPr id="29" name="Google Shape;29;p2:notes">
+            <a:extLst>
+              <a:ext uri="{FF2B5EF4-FFF2-40B4-BE49-F238E27FC236}">
+                <a16:creationId xmlns:a16="http://schemas.microsoft.com/office/drawing/2014/main" id="{41C9DAF0-B9FB-8D4F-06CB-0FE993D376D0}"/>
+              </a:ext>
+            </a:extLst>
+          </p:cNvPr>
           <p:cNvSpPr>
             <a:spLocks noGrp="1" noRot="1" noChangeAspect="1"/>
           </p:cNvSpPr>
@@ -1239,6 +1286,147 @@
             <a:tailEnd type="none" w="sm" len="sm"/>
           </a:ln>
         </p:spPr>
+        <p:txBody>
+          <a:bodyPr/>
+          <a:lstStyle/>
+          <a:p>
+            <a:endParaRPr lang="es-CO"/>
+          </a:p>
+        </p:txBody>
+      </p:sp>
+    </p:spTree>
+    <p:extLst>
+      <p:ext uri="{BB962C8B-B14F-4D97-AF65-F5344CB8AC3E}">
+        <p14:creationId xmlns:p14="http://schemas.microsoft.com/office/powerpoint/2010/main" val="1709511104"/>
+      </p:ext>
+    </p:extLst>
+  </p:cSld>
+  <p:clrMapOvr>
+    <a:masterClrMapping/>
+  </p:clrMapOvr>
+</p:notes>
+</file>
+
+<file path=ppt/notesSlides/notesSlide5.xml><?xml version="1.0" encoding="utf-8"?>
+<p:notes xmlns:a="http://schemas.openxmlformats.org/drawingml/2006/main" xmlns:r="http://schemas.openxmlformats.org/officeDocument/2006/relationships" xmlns:p="http://schemas.openxmlformats.org/presentationml/2006/main" showMasterSp="0" showMasterPhAnim="0">
+  <p:cSld>
+    <p:spTree>
+      <p:nvGrpSpPr>
+        <p:cNvPr id="1" name="Shape 607"/>
+        <p:cNvGrpSpPr/>
+        <p:nvPr/>
+      </p:nvGrpSpPr>
+      <p:grpSpPr>
+        <a:xfrm>
+          <a:off x="0" y="0"/>
+          <a:ext cx="0" cy="0"/>
+          <a:chOff x="0" y="0"/>
+          <a:chExt cx="0" cy="0"/>
+        </a:xfrm>
+      </p:grpSpPr>
+      <p:sp>
+        <p:nvSpPr>
+          <p:cNvPr id="608" name="Google Shape;608;p35:notes"/>
+          <p:cNvSpPr txBox="1">
+            <a:spLocks noGrp="1"/>
+          </p:cNvSpPr>
+          <p:nvPr>
+            <p:ph type="body" idx="1"/>
+          </p:nvPr>
+        </p:nvSpPr>
+        <p:spPr>
+          <a:xfrm>
+            <a:off x="685800" y="4343400"/>
+            <a:ext cx="5486400" cy="4114800"/>
+          </a:xfrm>
+          <a:prstGeom prst="rect">
+            <a:avLst/>
+          </a:prstGeom>
+          <a:noFill/>
+          <a:ln>
+            <a:noFill/>
+          </a:ln>
+        </p:spPr>
+        <p:txBody>
+          <a:bodyPr spcFirstLastPara="1" wrap="square" lIns="91425" tIns="91425" rIns="91425" bIns="91425" anchor="t" anchorCtr="0">
+            <a:noAutofit/>
+          </a:bodyPr>
+          <a:lstStyle/>
+          <a:p>
+            <a:pPr marL="0" lvl="0" indent="0" algn="l" rtl="0">
+              <a:lnSpc>
+                <a:spcPct val="100000"/>
+              </a:lnSpc>
+              <a:spcBef>
+                <a:spcPts val="0"/>
+              </a:spcBef>
+              <a:spcAft>
+                <a:spcPts val="0"/>
+              </a:spcAft>
+              <a:buSzPts val="1100"/>
+              <a:buNone/>
+            </a:pPr>
+            <a:endParaRPr/>
+          </a:p>
+        </p:txBody>
+      </p:sp>
+      <p:sp>
+        <p:nvSpPr>
+          <p:cNvPr id="609" name="Google Shape;609;p35:notes"/>
+          <p:cNvSpPr>
+            <a:spLocks noGrp="1" noRot="1" noChangeAspect="1"/>
+          </p:cNvSpPr>
+          <p:nvPr>
+            <p:ph type="sldImg" idx="2"/>
+          </p:nvPr>
+        </p:nvSpPr>
+        <p:spPr>
+          <a:xfrm>
+            <a:off x="381000" y="685800"/>
+            <a:ext cx="6096000" cy="3429000"/>
+          </a:xfrm>
+          <a:custGeom>
+            <a:avLst/>
+            <a:gdLst/>
+            <a:ahLst/>
+            <a:cxnLst/>
+            <a:rect l="l" t="t" r="r" b="b"/>
+            <a:pathLst>
+              <a:path w="120000" h="120000" extrusionOk="0">
+                <a:moveTo>
+                  <a:pt x="0" y="0"/>
+                </a:moveTo>
+                <a:lnTo>
+                  <a:pt x="120000" y="0"/>
+                </a:lnTo>
+                <a:lnTo>
+                  <a:pt x="120000" y="120000"/>
+                </a:lnTo>
+                <a:lnTo>
+                  <a:pt x="0" y="120000"/>
+                </a:lnTo>
+                <a:close/>
+              </a:path>
+            </a:pathLst>
+          </a:custGeom>
+          <a:noFill/>
+          <a:ln w="9525" cap="flat" cmpd="sng">
+            <a:solidFill>
+              <a:srgbClr val="000000"/>
+            </a:solidFill>
+            <a:prstDash val="solid"/>
+            <a:round/>
+            <a:headEnd type="none" w="sm" len="sm"/>
+            <a:tailEnd type="none" w="sm" len="sm"/>
+          </a:ln>
+        </p:spPr>
+        <p:txBody>
+          <a:bodyPr/>
+          <a:lstStyle/>
+          <a:p>
+            <a:endParaRPr lang="es-CO"/>
+          </a:p>
+        </p:txBody>
       </p:sp>
     </p:spTree>
   </p:cSld>
@@ -4772,11 +4960,7 @@
             </a:pPr>
             <a:r>
               <a:rPr lang="es-ES" sz="3200" b="1" dirty="0"/>
-              <a:t>Esperas Implícitas en </a:t>
-            </a:r>
-            <a:r>
-              <a:rPr lang="es-ES" sz="3200" b="1" dirty="0" err="1"/>
-              <a:t>Selenium</a:t>
+              <a:t>Esperas Implícitas en Selenium</a:t>
             </a:r>
             <a:endParaRPr sz="1400" b="0" i="0" u="none" strike="noStrike" cap="none" dirty="0">
               <a:solidFill>
@@ -4843,17 +5027,8 @@
             </a:pPr>
             <a:r>
               <a:rPr lang="es-CO" b="1" dirty="0"/>
-              <a:t>Luis Ospino Herrera</a:t>
-            </a:r>
-            <a:endParaRPr sz="1400" b="1" i="0" u="none" strike="noStrike" cap="none" dirty="0">
-              <a:solidFill>
-                <a:srgbClr val="000000"/>
-              </a:solidFill>
-              <a:latin typeface="Arial"/>
-              <a:ea typeface="Arial"/>
-              <a:cs typeface="Arial"/>
-              <a:sym typeface="Arial"/>
-            </a:endParaRPr>
+              <a:t>Luis Ospino</a:t>
+            </a:r>
           </a:p>
         </p:txBody>
       </p:sp>
@@ -5393,6 +5568,630 @@
   <p:cSld>
     <p:spTree>
       <p:nvGrpSpPr>
+        <p:cNvPr id="1" name="Shape 30">
+          <a:extLst>
+            <a:ext uri="{FF2B5EF4-FFF2-40B4-BE49-F238E27FC236}">
+              <a16:creationId xmlns:a16="http://schemas.microsoft.com/office/drawing/2014/main" id="{2BC8FFEB-2715-264C-0F79-E8059055FF0D}"/>
+            </a:ext>
+          </a:extLst>
+        </p:cNvPr>
+        <p:cNvGrpSpPr/>
+        <p:nvPr/>
+      </p:nvGrpSpPr>
+      <p:grpSpPr>
+        <a:xfrm>
+          <a:off x="0" y="0"/>
+          <a:ext cx="0" cy="0"/>
+          <a:chOff x="0" y="0"/>
+          <a:chExt cx="0" cy="0"/>
+        </a:xfrm>
+      </p:grpSpPr>
+      <p:sp>
+        <p:nvSpPr>
+          <p:cNvPr id="33" name="Google Shape;33;p2">
+            <a:extLst>
+              <a:ext uri="{FF2B5EF4-FFF2-40B4-BE49-F238E27FC236}">
+                <a16:creationId xmlns:a16="http://schemas.microsoft.com/office/drawing/2014/main" id="{D64762C6-D0B8-2936-5BA4-78688B6DD223}"/>
+              </a:ext>
+            </a:extLst>
+          </p:cNvPr>
+          <p:cNvSpPr txBox="1"/>
+          <p:nvPr/>
+        </p:nvSpPr>
+        <p:spPr>
+          <a:xfrm>
+            <a:off x="2156320" y="95777"/>
+            <a:ext cx="8986161" cy="1015622"/>
+          </a:xfrm>
+          <a:prstGeom prst="rect">
+            <a:avLst/>
+          </a:prstGeom>
+          <a:noFill/>
+          <a:ln>
+            <a:noFill/>
+          </a:ln>
+        </p:spPr>
+        <p:txBody>
+          <a:bodyPr spcFirstLastPara="1" wrap="square" lIns="91425" tIns="45700" rIns="91425" bIns="45700" anchor="t" anchorCtr="0">
+            <a:spAutoFit/>
+          </a:bodyPr>
+          <a:lstStyle/>
+          <a:p>
+            <a:pPr marL="0" marR="0" lvl="0" indent="0" algn="l" rtl="0">
+              <a:lnSpc>
+                <a:spcPct val="100000"/>
+              </a:lnSpc>
+              <a:spcBef>
+                <a:spcPts val="0"/>
+              </a:spcBef>
+              <a:spcAft>
+                <a:spcPts val="0"/>
+              </a:spcAft>
+              <a:buClr>
+                <a:srgbClr val="000000"/>
+              </a:buClr>
+              <a:buSzPts val="6000"/>
+              <a:buFont typeface="Arial"/>
+              <a:buNone/>
+            </a:pPr>
+            <a:r>
+              <a:rPr lang="es-ES" sz="6000" b="1" i="0" u="none" strike="noStrike" cap="none" dirty="0">
+                <a:solidFill>
+                  <a:srgbClr val="ED7402"/>
+                </a:solidFill>
+                <a:latin typeface="Archivo"/>
+                <a:ea typeface="Archivo"/>
+                <a:cs typeface="Archivo"/>
+                <a:sym typeface="Archivo"/>
+              </a:rPr>
+              <a:t>Ventajas y desventajas</a:t>
+            </a:r>
+          </a:p>
+        </p:txBody>
+      </p:sp>
+      <p:graphicFrame>
+        <p:nvGraphicFramePr>
+          <p:cNvPr id="5" name="Table 4">
+            <a:extLst>
+              <a:ext uri="{FF2B5EF4-FFF2-40B4-BE49-F238E27FC236}">
+                <a16:creationId xmlns:a16="http://schemas.microsoft.com/office/drawing/2014/main" id="{30BF24AF-B8E4-C5D5-03D3-30B834032956}"/>
+              </a:ext>
+            </a:extLst>
+          </p:cNvPr>
+          <p:cNvGraphicFramePr>
+            <a:graphicFrameLocks noGrp="1"/>
+          </p:cNvGraphicFramePr>
+          <p:nvPr>
+            <p:extLst>
+              <p:ext uri="{D42A27DB-BD31-4B8C-83A1-F6EECF244321}">
+                <p14:modId xmlns:p14="http://schemas.microsoft.com/office/powerpoint/2010/main" val="432504087"/>
+              </p:ext>
+            </p:extLst>
+          </p:nvPr>
+        </p:nvGraphicFramePr>
+        <p:xfrm>
+          <a:off x="2032000" y="1534055"/>
+          <a:ext cx="8128000" cy="4577080"/>
+        </p:xfrm>
+        <a:graphic>
+          <a:graphicData uri="http://schemas.openxmlformats.org/drawingml/2006/table">
+            <a:tbl>
+              <a:tblPr firstRow="1" bandRow="1">
+                <a:tableStyleId>{5C22544A-7EE6-4342-B048-85BDC9FD1C3A}</a:tableStyleId>
+              </a:tblPr>
+              <a:tblGrid>
+                <a:gridCol w="4064000">
+                  <a:extLst>
+                    <a:ext uri="{9D8B030D-6E8A-4147-A177-3AD203B41FA5}">
+                      <a16:colId xmlns:a16="http://schemas.microsoft.com/office/drawing/2014/main" val="3439630417"/>
+                    </a:ext>
+                  </a:extLst>
+                </a:gridCol>
+                <a:gridCol w="4064000">
+                  <a:extLst>
+                    <a:ext uri="{9D8B030D-6E8A-4147-A177-3AD203B41FA5}">
+                      <a16:colId xmlns:a16="http://schemas.microsoft.com/office/drawing/2014/main" val="4045440619"/>
+                    </a:ext>
+                  </a:extLst>
+                </a:gridCol>
+              </a:tblGrid>
+              <a:tr h="370840">
+                <a:tc>
+                  <a:txBody>
+                    <a:bodyPr/>
+                    <a:lstStyle/>
+                    <a:p>
+                      <a:pPr algn="ctr"/>
+                      <a:r>
+                        <a:rPr lang="es-CO" sz="1400" dirty="0"/>
+                        <a:t>Ventajas</a:t>
+                      </a:r>
+                    </a:p>
+                  </a:txBody>
+                  <a:tcPr/>
+                </a:tc>
+                <a:tc>
+                  <a:txBody>
+                    <a:bodyPr/>
+                    <a:lstStyle/>
+                    <a:p>
+                      <a:pPr algn="ctr"/>
+                      <a:r>
+                        <a:rPr lang="es-CO" sz="1400" dirty="0"/>
+                        <a:t>Desventajas</a:t>
+                      </a:r>
+                    </a:p>
+                  </a:txBody>
+                  <a:tcPr/>
+                </a:tc>
+                <a:extLst>
+                  <a:ext uri="{0D108BD9-81ED-4DB2-BD59-A6C34878D82A}">
+                    <a16:rowId xmlns:a16="http://schemas.microsoft.com/office/drawing/2014/main" val="543675860"/>
+                  </a:ext>
+                </a:extLst>
+              </a:tr>
+              <a:tr h="370840">
+                <a:tc>
+                  <a:txBody>
+                    <a:bodyPr/>
+                    <a:lstStyle/>
+                    <a:p>
+                      <a:pPr marL="285750" indent="-285750" algn="l">
+                        <a:buFont typeface="Arial" panose="020B0604020202020204" pitchFamily="34" charset="0"/>
+                        <a:buChar char="•"/>
+                      </a:pPr>
+                      <a:r>
+                        <a:rPr lang="es-ES" sz="1400" b="1" i="0" kern="1200" dirty="0">
+                          <a:solidFill>
+                            <a:schemeClr val="dk1"/>
+                          </a:solidFill>
+                          <a:effectLst/>
+                          <a:latin typeface="+mn-lt"/>
+                          <a:ea typeface="+mn-ea"/>
+                          <a:cs typeface="+mn-cs"/>
+                        </a:rPr>
+                        <a:t>Simplicidad y Configuración Global:</a:t>
+                      </a:r>
+                      <a:r>
+                        <a:rPr lang="es-ES" sz="1400" b="0" i="0" kern="1200" dirty="0">
+                          <a:solidFill>
+                            <a:schemeClr val="dk1"/>
+                          </a:solidFill>
+                          <a:effectLst/>
+                          <a:latin typeface="+mn-lt"/>
+                          <a:ea typeface="+mn-ea"/>
+                          <a:cs typeface="+mn-cs"/>
+                        </a:rPr>
+                        <a:t> Se definen una sola vez al inicio de la sesión del navegador y se aplican automáticamente a todos los elementos durante la vida útil del objeto </a:t>
+                      </a:r>
+                      <a:r>
+                        <a:rPr lang="es-ES" sz="1400" b="0" i="0" kern="1200" dirty="0" err="1">
+                          <a:solidFill>
+                            <a:schemeClr val="dk1"/>
+                          </a:solidFill>
+                          <a:effectLst/>
+                          <a:latin typeface="+mn-lt"/>
+                          <a:ea typeface="+mn-ea"/>
+                          <a:cs typeface="+mn-cs"/>
+                        </a:rPr>
+                        <a:t>WebDriver</a:t>
+                      </a:r>
+                      <a:endParaRPr lang="es-CO" sz="1400" dirty="0"/>
+                    </a:p>
+                  </a:txBody>
+                  <a:tcPr/>
+                </a:tc>
+                <a:tc>
+                  <a:txBody>
+                    <a:bodyPr/>
+                    <a:lstStyle/>
+                    <a:p>
+                      <a:pPr marL="285750" marR="0" lvl="0" indent="-285750" algn="l" defTabSz="914400" rtl="0" eaLnBrk="1" fontAlgn="auto" latinLnBrk="0" hangingPunct="1">
+                        <a:lnSpc>
+                          <a:spcPct val="100000"/>
+                        </a:lnSpc>
+                        <a:spcBef>
+                          <a:spcPts val="0"/>
+                        </a:spcBef>
+                        <a:spcAft>
+                          <a:spcPts val="0"/>
+                        </a:spcAft>
+                        <a:buClrTx/>
+                        <a:buSzTx/>
+                        <a:buFont typeface="Arial" panose="020B0604020202020204" pitchFamily="34" charset="0"/>
+                        <a:buChar char="•"/>
+                        <a:tabLst/>
+                        <a:defRPr/>
+                      </a:pPr>
+                      <a:r>
+                        <a:rPr lang="es-ES" sz="1400" b="1" i="0" kern="1200" dirty="0">
+                          <a:solidFill>
+                            <a:schemeClr val="dk1"/>
+                          </a:solidFill>
+                          <a:effectLst/>
+                          <a:latin typeface="+mn-lt"/>
+                          <a:ea typeface="+mn-ea"/>
+                          <a:cs typeface="+mn-cs"/>
+                        </a:rPr>
+                        <a:t>Ralentización de Pruebas:</a:t>
+                      </a:r>
+                      <a:r>
+                        <a:rPr lang="es-ES" sz="1400" b="0" i="0" kern="1200" dirty="0">
+                          <a:solidFill>
+                            <a:schemeClr val="dk1"/>
+                          </a:solidFill>
+                          <a:effectLst/>
+                          <a:latin typeface="+mn-lt"/>
+                          <a:ea typeface="+mn-ea"/>
+                          <a:cs typeface="+mn-cs"/>
+                        </a:rPr>
+                        <a:t> Si un elemento tarda en aparecer, el controlador espera el tiempo máximo configurado antes de lanzar una excepción, aumentando el tiempo total de ejecución.</a:t>
+                      </a:r>
+                    </a:p>
+                  </a:txBody>
+                  <a:tcPr/>
+                </a:tc>
+                <a:extLst>
+                  <a:ext uri="{0D108BD9-81ED-4DB2-BD59-A6C34878D82A}">
+                    <a16:rowId xmlns:a16="http://schemas.microsoft.com/office/drawing/2014/main" val="1392951795"/>
+                  </a:ext>
+                </a:extLst>
+              </a:tr>
+              <a:tr h="370840">
+                <a:tc>
+                  <a:txBody>
+                    <a:bodyPr/>
+                    <a:lstStyle/>
+                    <a:p>
+                      <a:pPr marL="285750" marR="0" lvl="0" indent="-285750" algn="l" defTabSz="914400" rtl="0" eaLnBrk="1" fontAlgn="auto" latinLnBrk="0" hangingPunct="1">
+                        <a:lnSpc>
+                          <a:spcPct val="100000"/>
+                        </a:lnSpc>
+                        <a:spcBef>
+                          <a:spcPts val="0"/>
+                        </a:spcBef>
+                        <a:spcAft>
+                          <a:spcPts val="0"/>
+                        </a:spcAft>
+                        <a:buClrTx/>
+                        <a:buSzTx/>
+                        <a:buFont typeface="Arial" panose="020B0604020202020204" pitchFamily="34" charset="0"/>
+                        <a:buChar char="•"/>
+                        <a:tabLst/>
+                        <a:defRPr/>
+                      </a:pPr>
+                      <a:r>
+                        <a:rPr lang="es-ES" sz="1400" b="1" i="0" kern="1200" dirty="0">
+                          <a:solidFill>
+                            <a:schemeClr val="dk1"/>
+                          </a:solidFill>
+                          <a:effectLst/>
+                          <a:latin typeface="+mn-lt"/>
+                          <a:ea typeface="+mn-ea"/>
+                          <a:cs typeface="+mn-cs"/>
+                        </a:rPr>
+                        <a:t>Código más Limpio:</a:t>
+                      </a:r>
+                      <a:r>
+                        <a:rPr lang="es-ES" sz="1400" b="0" i="0" kern="1200" dirty="0">
+                          <a:solidFill>
+                            <a:schemeClr val="dk1"/>
+                          </a:solidFill>
+                          <a:effectLst/>
+                          <a:latin typeface="+mn-lt"/>
+                          <a:ea typeface="+mn-ea"/>
+                          <a:cs typeface="+mn-cs"/>
+                        </a:rPr>
+                        <a:t> Evitan tener que poner instrucciones de espera después de cada comando </a:t>
+                      </a:r>
+                      <a:r>
+                        <a:rPr lang="es-ES" sz="1400" b="0" i="0" kern="1200" dirty="0" err="1">
+                          <a:solidFill>
+                            <a:schemeClr val="dk1"/>
+                          </a:solidFill>
+                          <a:effectLst/>
+                          <a:latin typeface="+mn-lt"/>
+                          <a:ea typeface="+mn-ea"/>
+                          <a:cs typeface="+mn-cs"/>
+                        </a:rPr>
+                        <a:t>find_element</a:t>
+                      </a:r>
+                      <a:r>
+                        <a:rPr lang="es-ES" sz="1400" b="0" i="0" kern="1200" dirty="0">
+                          <a:solidFill>
+                            <a:schemeClr val="dk1"/>
+                          </a:solidFill>
+                          <a:effectLst/>
+                          <a:latin typeface="+mn-lt"/>
+                          <a:ea typeface="+mn-ea"/>
+                          <a:cs typeface="+mn-cs"/>
+                        </a:rPr>
+                        <a:t>.</a:t>
+                      </a:r>
+                    </a:p>
+                  </a:txBody>
+                  <a:tcPr/>
+                </a:tc>
+                <a:tc>
+                  <a:txBody>
+                    <a:bodyPr/>
+                    <a:lstStyle/>
+                    <a:p>
+                      <a:pPr marL="285750" marR="0" lvl="0" indent="-285750" algn="l" defTabSz="914400" rtl="0" eaLnBrk="1" fontAlgn="auto" latinLnBrk="0" hangingPunct="1">
+                        <a:lnSpc>
+                          <a:spcPct val="100000"/>
+                        </a:lnSpc>
+                        <a:spcBef>
+                          <a:spcPts val="0"/>
+                        </a:spcBef>
+                        <a:spcAft>
+                          <a:spcPts val="0"/>
+                        </a:spcAft>
+                        <a:buClrTx/>
+                        <a:buSzTx/>
+                        <a:buFont typeface="Arial" panose="020B0604020202020204" pitchFamily="34" charset="0"/>
+                        <a:buChar char="•"/>
+                        <a:tabLst/>
+                        <a:defRPr/>
+                      </a:pPr>
+                      <a:r>
+                        <a:rPr lang="es-ES" sz="1400" b="1" i="0" kern="1200" dirty="0">
+                          <a:solidFill>
+                            <a:schemeClr val="dk1"/>
+                          </a:solidFill>
+                          <a:effectLst/>
+                          <a:latin typeface="+mn-lt"/>
+                          <a:ea typeface="+mn-ea"/>
+                          <a:cs typeface="+mn-cs"/>
+                        </a:rPr>
+                        <a:t>Alcance Limitado:</a:t>
+                      </a:r>
+                      <a:r>
+                        <a:rPr lang="es-ES" sz="1400" b="0" i="0" kern="1200" dirty="0">
+                          <a:solidFill>
+                            <a:schemeClr val="dk1"/>
+                          </a:solidFill>
+                          <a:effectLst/>
+                          <a:latin typeface="+mn-lt"/>
+                          <a:ea typeface="+mn-ea"/>
+                          <a:cs typeface="+mn-cs"/>
+                        </a:rPr>
+                        <a:t> Solo funcionan para </a:t>
+                      </a:r>
+                      <a:r>
+                        <a:rPr lang="es-ES" sz="1400" b="0" i="0" kern="1200" dirty="0" err="1">
+                          <a:solidFill>
+                            <a:schemeClr val="dk1"/>
+                          </a:solidFill>
+                          <a:effectLst/>
+                          <a:latin typeface="+mn-lt"/>
+                          <a:ea typeface="+mn-ea"/>
+                          <a:cs typeface="+mn-cs"/>
+                        </a:rPr>
+                        <a:t>findElement</a:t>
+                      </a:r>
+                      <a:r>
+                        <a:rPr lang="es-ES" sz="1400" b="0" i="0" kern="1200" dirty="0">
+                          <a:solidFill>
+                            <a:schemeClr val="dk1"/>
+                          </a:solidFill>
+                          <a:effectLst/>
+                          <a:latin typeface="+mn-lt"/>
+                          <a:ea typeface="+mn-ea"/>
+                          <a:cs typeface="+mn-cs"/>
+                        </a:rPr>
+                        <a:t> (localizar elementos). No sirven para esperar condiciones específicas como "elemento </a:t>
+                      </a:r>
+                      <a:r>
+                        <a:rPr lang="es-ES" sz="1400" b="0" i="0" kern="1200" dirty="0" err="1">
+                          <a:solidFill>
+                            <a:schemeClr val="dk1"/>
+                          </a:solidFill>
+                          <a:effectLst/>
+                          <a:latin typeface="+mn-lt"/>
+                          <a:ea typeface="+mn-ea"/>
+                          <a:cs typeface="+mn-cs"/>
+                        </a:rPr>
+                        <a:t>clicable</a:t>
+                      </a:r>
+                      <a:r>
+                        <a:rPr lang="es-ES" sz="1400" b="0" i="0" kern="1200" dirty="0">
+                          <a:solidFill>
+                            <a:schemeClr val="dk1"/>
+                          </a:solidFill>
+                          <a:effectLst/>
+                          <a:latin typeface="+mn-lt"/>
+                          <a:ea typeface="+mn-ea"/>
+                          <a:cs typeface="+mn-cs"/>
+                        </a:rPr>
+                        <a:t>", "invisibilidad", o la carga de alertas/URL.</a:t>
+                      </a:r>
+                    </a:p>
+                  </a:txBody>
+                  <a:tcPr/>
+                </a:tc>
+                <a:extLst>
+                  <a:ext uri="{0D108BD9-81ED-4DB2-BD59-A6C34878D82A}">
+                    <a16:rowId xmlns:a16="http://schemas.microsoft.com/office/drawing/2014/main" val="1520706906"/>
+                  </a:ext>
+                </a:extLst>
+              </a:tr>
+              <a:tr h="370840">
+                <a:tc>
+                  <a:txBody>
+                    <a:bodyPr/>
+                    <a:lstStyle/>
+                    <a:p>
+                      <a:pPr marL="285750" indent="-285750" algn="l">
+                        <a:buFont typeface="Arial" panose="020B0604020202020204" pitchFamily="34" charset="0"/>
+                        <a:buChar char="•"/>
+                      </a:pPr>
+                      <a:r>
+                        <a:rPr lang="es-ES" sz="1400" b="1" i="0" kern="1200" dirty="0">
+                          <a:solidFill>
+                            <a:schemeClr val="dk1"/>
+                          </a:solidFill>
+                          <a:effectLst/>
+                          <a:latin typeface="+mn-lt"/>
+                          <a:ea typeface="+mn-ea"/>
+                          <a:cs typeface="+mn-cs"/>
+                        </a:rPr>
+                        <a:t>Manejo de Cargas Asíncronas:</a:t>
+                      </a:r>
+                      <a:r>
+                        <a:rPr lang="es-ES" sz="1400" b="0" i="0" kern="1200" dirty="0">
+                          <a:solidFill>
+                            <a:schemeClr val="dk1"/>
+                          </a:solidFill>
+                          <a:effectLst/>
+                          <a:latin typeface="+mn-lt"/>
+                          <a:ea typeface="+mn-ea"/>
+                          <a:cs typeface="+mn-cs"/>
+                        </a:rPr>
+                        <a:t> Útil en aplicaciones web modernas para dar tiempo a que los elementos sean renderizados posteriormente.</a:t>
+                      </a:r>
+                      <a:endParaRPr lang="es-CO" sz="1400" dirty="0"/>
+                    </a:p>
+                  </a:txBody>
+                  <a:tcPr/>
+                </a:tc>
+                <a:tc>
+                  <a:txBody>
+                    <a:bodyPr/>
+                    <a:lstStyle/>
+                    <a:p>
+                      <a:pPr marL="285750" marR="0" lvl="0" indent="-285750" algn="l" defTabSz="914400" rtl="0" eaLnBrk="1" fontAlgn="auto" latinLnBrk="0" hangingPunct="1">
+                        <a:lnSpc>
+                          <a:spcPct val="100000"/>
+                        </a:lnSpc>
+                        <a:spcBef>
+                          <a:spcPts val="0"/>
+                        </a:spcBef>
+                        <a:spcAft>
+                          <a:spcPts val="0"/>
+                        </a:spcAft>
+                        <a:buClrTx/>
+                        <a:buSzTx/>
+                        <a:buFont typeface="Arial" panose="020B0604020202020204" pitchFamily="34" charset="0"/>
+                        <a:buChar char="•"/>
+                        <a:tabLst/>
+                        <a:defRPr/>
+                      </a:pPr>
+                      <a:r>
+                        <a:rPr lang="es-ES" sz="1400" b="1" i="0" kern="1200" dirty="0">
+                          <a:solidFill>
+                            <a:schemeClr val="dk1"/>
+                          </a:solidFill>
+                          <a:effectLst/>
+                          <a:latin typeface="+mn-lt"/>
+                          <a:ea typeface="+mn-ea"/>
+                          <a:cs typeface="+mn-cs"/>
+                        </a:rPr>
+                        <a:t>Riesgo de Conflictos:</a:t>
+                      </a:r>
+                      <a:r>
+                        <a:rPr lang="es-ES" sz="1400" b="0" i="0" kern="1200" dirty="0">
+                          <a:solidFill>
+                            <a:schemeClr val="dk1"/>
+                          </a:solidFill>
+                          <a:effectLst/>
+                          <a:latin typeface="+mn-lt"/>
+                          <a:ea typeface="+mn-ea"/>
+                          <a:cs typeface="+mn-cs"/>
+                        </a:rPr>
+                        <a:t> No se recomienda mezclarlas con esperas explícitas, ya que pueden causar comportamientos impredecibles en los tiempos de espera.</a:t>
+                      </a:r>
+                    </a:p>
+                  </a:txBody>
+                  <a:tcPr/>
+                </a:tc>
+                <a:extLst>
+                  <a:ext uri="{0D108BD9-81ED-4DB2-BD59-A6C34878D82A}">
+                    <a16:rowId xmlns:a16="http://schemas.microsoft.com/office/drawing/2014/main" val="797136905"/>
+                  </a:ext>
+                </a:extLst>
+              </a:tr>
+              <a:tr h="370840">
+                <a:tc>
+                  <a:txBody>
+                    <a:bodyPr/>
+                    <a:lstStyle/>
+                    <a:p>
+                      <a:pPr marL="285750" indent="-285750" algn="l">
+                        <a:buFont typeface="Arial" panose="020B0604020202020204" pitchFamily="34" charset="0"/>
+                        <a:buChar char="•"/>
+                      </a:pPr>
+                      <a:endParaRPr lang="es-CO" sz="1400"/>
+                    </a:p>
+                  </a:txBody>
+                  <a:tcPr/>
+                </a:tc>
+                <a:tc>
+                  <a:txBody>
+                    <a:bodyPr/>
+                    <a:lstStyle/>
+                    <a:p>
+                      <a:pPr marL="285750" indent="-285750" algn="l">
+                        <a:buFont typeface="Arial" panose="020B0604020202020204" pitchFamily="34" charset="0"/>
+                        <a:buChar char="•"/>
+                      </a:pPr>
+                      <a:r>
+                        <a:rPr lang="es-CO" sz="1400" b="1" i="0" kern="1200" dirty="0">
+                          <a:solidFill>
+                            <a:schemeClr val="dk1"/>
+                          </a:solidFill>
+                          <a:effectLst/>
+                          <a:latin typeface="+mn-lt"/>
+                          <a:ea typeface="+mn-ea"/>
+                          <a:cs typeface="+mn-cs"/>
+                        </a:rPr>
+                        <a:t>Menos Flexibilidad:</a:t>
+                      </a:r>
+                      <a:r>
+                        <a:rPr lang="es-CO" sz="1400" b="0" i="0" kern="1200" dirty="0">
+                          <a:solidFill>
+                            <a:schemeClr val="dk1"/>
+                          </a:solidFill>
+                          <a:effectLst/>
+                          <a:latin typeface="+mn-lt"/>
+                          <a:ea typeface="+mn-ea"/>
+                          <a:cs typeface="+mn-cs"/>
+                        </a:rPr>
+                        <a:t> A diferencia de las esperas explícitas, no son dinámicas ni específicas para cada elemento, aplicándose por igual a búsquedas rápidas o lentas.</a:t>
+                      </a:r>
+                      <a:endParaRPr lang="es-CO" sz="1400" dirty="0"/>
+                    </a:p>
+                  </a:txBody>
+                  <a:tcPr/>
+                </a:tc>
+                <a:extLst>
+                  <a:ext uri="{0D108BD9-81ED-4DB2-BD59-A6C34878D82A}">
+                    <a16:rowId xmlns:a16="http://schemas.microsoft.com/office/drawing/2014/main" val="91394325"/>
+                  </a:ext>
+                </a:extLst>
+              </a:tr>
+            </a:tbl>
+          </a:graphicData>
+        </a:graphic>
+      </p:graphicFrame>
+    </p:spTree>
+    <p:extLst>
+      <p:ext uri="{BB962C8B-B14F-4D97-AF65-F5344CB8AC3E}">
+        <p14:creationId xmlns:p14="http://schemas.microsoft.com/office/powerpoint/2010/main" val="529900990"/>
+      </p:ext>
+    </p:extLst>
+  </p:cSld>
+  <p:clrMapOvr>
+    <a:masterClrMapping/>
+  </p:clrMapOvr>
+</p:sld>
+</file>
+
+<file path=ppt/slides/slide5.xml><?xml version="1.0" encoding="utf-8"?>
+<p:sld xmlns:a="http://schemas.openxmlformats.org/drawingml/2006/main" xmlns:r="http://schemas.openxmlformats.org/officeDocument/2006/relationships" xmlns:p="http://schemas.openxmlformats.org/presentationml/2006/main">
+  <p:cSld>
+    <p:spTree>
+      <p:nvGrpSpPr>
         <p:cNvPr id="1" name="Shape 610"/>
         <p:cNvGrpSpPr/>
         <p:nvPr/>
@@ -5414,7 +6213,7 @@
         <p:spPr>
           <a:xfrm>
             <a:off x="370599" y="1145773"/>
-            <a:ext cx="7177200" cy="1311433"/>
+            <a:ext cx="11107026" cy="1311433"/>
           </a:xfrm>
           <a:prstGeom prst="rect">
             <a:avLst/>
@@ -5448,7 +6247,7 @@
               <a:buNone/>
             </a:pPr>
             <a:r>
-              <a:rPr lang="es-ES" sz="7000" b="1" i="0" u="none" strike="noStrike" cap="none">
+              <a:rPr lang="es-ES" sz="7000" b="1" i="0" u="none" strike="noStrike" cap="none" dirty="0">
                 <a:solidFill>
                   <a:schemeClr val="lt1"/>
                 </a:solidFill>
@@ -5457,9 +6256,33 @@
                 <a:cs typeface="Archivo ExtraBold"/>
                 <a:sym typeface="Archivo ExtraBold"/>
               </a:rPr>
-              <a:t>¡Gracias!</a:t>
-            </a:r>
-            <a:endParaRPr sz="7000" b="1" i="0" u="none" strike="noStrike" cap="none">
+              <a:t>¡</a:t>
+            </a:r>
+            <a:r>
+              <a:rPr lang="es-ES" sz="7000" b="1" dirty="0">
+                <a:solidFill>
+                  <a:schemeClr val="lt1"/>
+                </a:solidFill>
+                <a:latin typeface="Archivo ExtraBold"/>
+                <a:ea typeface="Archivo ExtraBold"/>
+                <a:cs typeface="Archivo ExtraBold"/>
+                <a:sym typeface="Archivo ExtraBold"/>
+              </a:rPr>
+              <a:t>Vamos a los ejemplos</a:t>
+            </a:r>
+            <a:r>
+              <a:rPr lang="es-ES" sz="7000" b="1" i="0" u="none" strike="noStrike" cap="none" dirty="0">
+                <a:solidFill>
+                  <a:schemeClr val="lt1"/>
+                </a:solidFill>
+                <a:latin typeface="Archivo ExtraBold"/>
+                <a:ea typeface="Archivo ExtraBold"/>
+                <a:cs typeface="Archivo ExtraBold"/>
+                <a:sym typeface="Archivo ExtraBold"/>
+              </a:rPr>
+              <a:t>!</a:t>
+            </a:r>
+            <a:endParaRPr sz="7000" b="1" i="0" u="none" strike="noStrike" cap="none" dirty="0">
               <a:solidFill>
                 <a:schemeClr val="lt1"/>
               </a:solidFill>
